--- a/03-课件PPT/讲次版/第3章-1-讲次 3-1 · 从 Tool Agent 到 Agen.pptx
+++ b/03-课件PPT/讲次版/第3章-1-讲次 3-1 · 从 Tool Agent 到 Agen.pptx
@@ -5967,8 +5967,8 @@
         </p:nvSpPr>
         <p:spPr>
           <a:xfrm>
-            <a:off x="3849687" y="1419225"/>
-            <a:ext cx="1123950" cy="285750"/>
+            <a:off x="3849687" y="1409700"/>
+            <a:ext cx="1123950" cy="304800"/>
           </a:xfrm>
           <a:prstGeom prst="roundRect">
             <a:avLst>
@@ -6015,8 +6015,8 @@
         </p:nvSpPr>
         <p:spPr>
           <a:xfrm>
-            <a:off x="3849687" y="1419225"/>
-            <a:ext cx="1123950" cy="285750"/>
+            <a:off x="3849687" y="1409700"/>
+            <a:ext cx="1123950" cy="304800"/>
           </a:xfrm>
           <a:prstGeom prst="rect">
             <a:avLst/>
@@ -6133,8 +6133,8 @@
         </p:nvSpPr>
         <p:spPr>
           <a:xfrm>
-            <a:off x="7151687" y="1419225"/>
-            <a:ext cx="1123950" cy="285750"/>
+            <a:off x="7151687" y="1409700"/>
+            <a:ext cx="1123950" cy="304800"/>
           </a:xfrm>
           <a:prstGeom prst="roundRect">
             <a:avLst>
@@ -6181,8 +6181,8 @@
         </p:nvSpPr>
         <p:spPr>
           <a:xfrm>
-            <a:off x="7151687" y="1419225"/>
-            <a:ext cx="1123950" cy="285750"/>
+            <a:off x="7151687" y="1409700"/>
+            <a:ext cx="1123950" cy="304800"/>
           </a:xfrm>
           <a:prstGeom prst="rect">
             <a:avLst/>
@@ -6219,358 +6219,136 @@
           <p:nvPr/>
         </p:nvCxnSpPr>
         <p:spPr>
-          <a:xfrm flipV="1">
-            <a:off x="9398000" y="847725"/>
-            <a:ext cx="0" cy="419100"/>
+          <a:xfrm>
+            <a:off x="3889375" y="2990850"/>
+            <a:ext cx="1044575" cy="0"/>
           </a:xfrm>
           <a:prstGeom prst="line">
             <a:avLst/>
           </a:prstGeom>
+          <a:ln w="19050">
+            <a:solidFill>
+              <a:srgbClr val="2563EB"/>
+            </a:solidFill>
+          </a:ln>
+        </p:spPr>
+        <p:style>
+          <a:lnRef idx="2">
+            <a:schemeClr val="accent1"/>
+          </a:lnRef>
+          <a:fillRef idx="0">
+            <a:schemeClr val="accent1"/>
+          </a:fillRef>
+          <a:effectRef idx="1">
+            <a:schemeClr val="accent1"/>
+          </a:effectRef>
+          <a:fontRef idx="minor">
+            <a:schemeClr val="tx1"/>
+          </a:fontRef>
+        </p:style>
+      </p:cxnSp>
+      <p:sp>
+        <p:nvSpPr>
+          <p:cNvPr id="32" name="Isosceles Triangle 31"/>
+          <p:cNvSpPr/>
+          <p:nvPr/>
+        </p:nvSpPr>
+        <p:spPr>
+          <a:xfrm rot="5400000">
+            <a:off x="4848226" y="2947988"/>
+            <a:ext cx="85725" cy="85725"/>
+          </a:xfrm>
+          <a:prstGeom prst="triangle">
+            <a:avLst/>
+          </a:prstGeom>
+          <a:solidFill>
+            <a:srgbClr val="2563EB"/>
+          </a:solidFill>
+          <a:ln>
+            <a:noFill/>
+          </a:ln>
+          <a:effectLst/>
+        </p:spPr>
+        <p:style>
+          <a:lnRef idx="1">
+            <a:schemeClr val="accent1"/>
+          </a:lnRef>
+          <a:fillRef idx="3">
+            <a:schemeClr val="accent1"/>
+          </a:fillRef>
+          <a:effectRef idx="2">
+            <a:schemeClr val="accent1"/>
+          </a:effectRef>
+          <a:fontRef idx="minor">
+            <a:schemeClr val="lt1"/>
+          </a:fontRef>
+        </p:style>
+        <p:txBody>
+          <a:bodyPr rtlCol="0" anchor="ctr"/>
+          <a:lstStyle/>
+          <a:p>
+            <a:pPr algn="ctr"/>
+          </a:p>
+        </p:txBody>
+      </p:sp>
+      <p:sp>
+        <p:nvSpPr>
+          <p:cNvPr id="33" name="Rounded Rectangle 32"/>
+          <p:cNvSpPr/>
+          <p:nvPr/>
+        </p:nvSpPr>
+        <p:spPr>
+          <a:xfrm>
+            <a:off x="3849687" y="2838450"/>
+            <a:ext cx="1123950" cy="304800"/>
+          </a:xfrm>
+          <a:prstGeom prst="roundRect">
+            <a:avLst>
+              <a:gd name="adj" fmla="val 8000"/>
+            </a:avLst>
+          </a:prstGeom>
+          <a:solidFill>
+            <a:srgbClr val="FFFFFF"/>
+          </a:solidFill>
           <a:ln w="12700">
             <a:solidFill>
               <a:srgbClr val="DDE5EE"/>
             </a:solidFill>
-            <a:prstDash val="dash"/>
-          </a:ln>
-          <a:effectLst/>
-        </p:spPr>
-        <p:style>
-          <a:lnRef idx="2">
-            <a:schemeClr val="accent1"/>
-          </a:lnRef>
-          <a:fillRef idx="0">
-            <a:schemeClr val="accent1"/>
-          </a:fillRef>
-          <a:effectRef idx="1">
-            <a:schemeClr val="accent1"/>
-          </a:effectRef>
-          <a:fontRef idx="minor">
-            <a:schemeClr val="tx1"/>
-          </a:fontRef>
-        </p:style>
-      </p:cxnSp>
-      <p:cxnSp>
-        <p:nvCxnSpPr>
-          <p:cNvPr id="32" name="Connector 31"/>
-          <p:cNvCxnSpPr/>
-          <p:nvPr/>
-        </p:nvCxnSpPr>
-        <p:spPr>
-          <a:xfrm flipH="1">
-            <a:off x="2794000" y="847725"/>
-            <a:ext cx="6604000" cy="0"/>
-          </a:xfrm>
-          <a:prstGeom prst="line">
-            <a:avLst/>
-          </a:prstGeom>
-          <a:ln w="12700">
-            <a:solidFill>
-              <a:srgbClr val="DDE5EE"/>
-            </a:solidFill>
-            <a:prstDash val="dash"/>
-          </a:ln>
-          <a:effectLst/>
-        </p:spPr>
-        <p:style>
-          <a:lnRef idx="2">
-            <a:schemeClr val="accent1"/>
-          </a:lnRef>
-          <a:fillRef idx="0">
-            <a:schemeClr val="accent1"/>
-          </a:fillRef>
-          <a:effectRef idx="1">
-            <a:schemeClr val="accent1"/>
-          </a:effectRef>
-          <a:fontRef idx="minor">
-            <a:schemeClr val="tx1"/>
-          </a:fontRef>
-        </p:style>
-      </p:cxnSp>
-      <p:cxnSp>
-        <p:nvCxnSpPr>
-          <p:cNvPr id="33" name="Connector 32"/>
-          <p:cNvCxnSpPr/>
-          <p:nvPr/>
-        </p:nvCxnSpPr>
-        <p:spPr>
-          <a:xfrm>
-            <a:off x="2794000" y="847725"/>
-            <a:ext cx="0" cy="1781175"/>
-          </a:xfrm>
-          <a:prstGeom prst="line">
-            <a:avLst/>
-          </a:prstGeom>
-          <a:ln w="12700">
-            <a:solidFill>
-              <a:srgbClr val="DDE5EE"/>
-            </a:solidFill>
-            <a:prstDash val="dash"/>
-          </a:ln>
-          <a:effectLst/>
-        </p:spPr>
-        <p:style>
-          <a:lnRef idx="2">
-            <a:schemeClr val="accent1"/>
-          </a:lnRef>
-          <a:fillRef idx="0">
-            <a:schemeClr val="accent1"/>
-          </a:fillRef>
-          <a:effectRef idx="1">
-            <a:schemeClr val="accent1"/>
-          </a:effectRef>
-          <a:fontRef idx="minor">
-            <a:schemeClr val="tx1"/>
-          </a:fontRef>
-        </p:style>
-      </p:cxnSp>
-      <p:cxnSp>
-        <p:nvCxnSpPr>
-          <p:cNvPr id="34" name="Connector 33"/>
-          <p:cNvCxnSpPr/>
-          <p:nvPr/>
-        </p:nvCxnSpPr>
-        <p:spPr>
-          <a:xfrm flipV="1">
-            <a:off x="2794000" y="847725"/>
-            <a:ext cx="0" cy="1847850"/>
-          </a:xfrm>
-          <a:prstGeom prst="line">
-            <a:avLst/>
-          </a:prstGeom>
-          <a:ln w="12700">
-            <a:solidFill>
-              <a:srgbClr val="DDE5EE"/>
-            </a:solidFill>
-            <a:prstDash val="dash"/>
-          </a:ln>
-          <a:effectLst/>
-        </p:spPr>
-        <p:style>
-          <a:lnRef idx="2">
-            <a:schemeClr val="accent1"/>
-          </a:lnRef>
-          <a:fillRef idx="0">
-            <a:schemeClr val="accent1"/>
-          </a:fillRef>
-          <a:effectRef idx="1">
-            <a:schemeClr val="accent1"/>
-          </a:effectRef>
-          <a:fontRef idx="minor">
-            <a:schemeClr val="tx1"/>
-          </a:fontRef>
-        </p:style>
-      </p:cxnSp>
-      <p:cxnSp>
-        <p:nvCxnSpPr>
-          <p:cNvPr id="35" name="Connector 34"/>
-          <p:cNvCxnSpPr/>
-          <p:nvPr/>
-        </p:nvCxnSpPr>
-        <p:spPr>
-          <a:xfrm>
-            <a:off x="2794000" y="847725"/>
-            <a:ext cx="6604000" cy="0"/>
-          </a:xfrm>
-          <a:prstGeom prst="line">
-            <a:avLst/>
-          </a:prstGeom>
-          <a:ln w="12700">
-            <a:solidFill>
-              <a:srgbClr val="DDE5EE"/>
-            </a:solidFill>
-            <a:prstDash val="dash"/>
-          </a:ln>
-          <a:effectLst/>
-        </p:spPr>
-        <p:style>
-          <a:lnRef idx="2">
-            <a:schemeClr val="accent1"/>
-          </a:lnRef>
-          <a:fillRef idx="0">
-            <a:schemeClr val="accent1"/>
-          </a:fillRef>
-          <a:effectRef idx="1">
-            <a:schemeClr val="accent1"/>
-          </a:effectRef>
-          <a:fontRef idx="minor">
-            <a:schemeClr val="tx1"/>
-          </a:fontRef>
-        </p:style>
-      </p:cxnSp>
-      <p:cxnSp>
-        <p:nvCxnSpPr>
-          <p:cNvPr id="36" name="Connector 35"/>
-          <p:cNvCxnSpPr/>
-          <p:nvPr/>
-        </p:nvCxnSpPr>
-        <p:spPr>
-          <a:xfrm>
-            <a:off x="9398000" y="847725"/>
-            <a:ext cx="0" cy="352425"/>
-          </a:xfrm>
-          <a:prstGeom prst="line">
-            <a:avLst/>
-          </a:prstGeom>
-          <a:ln w="12700">
-            <a:solidFill>
-              <a:srgbClr val="DDE5EE"/>
-            </a:solidFill>
-            <a:prstDash val="dash"/>
-          </a:ln>
-          <a:effectLst/>
-        </p:spPr>
-        <p:style>
-          <a:lnRef idx="2">
-            <a:schemeClr val="accent1"/>
-          </a:lnRef>
-          <a:fillRef idx="0">
-            <a:schemeClr val="accent1"/>
-          </a:fillRef>
-          <a:effectRef idx="1">
-            <a:schemeClr val="accent1"/>
-          </a:effectRef>
-          <a:fontRef idx="minor">
-            <a:schemeClr val="tx1"/>
-          </a:fontRef>
-        </p:style>
-      </p:cxnSp>
-      <p:cxnSp>
-        <p:nvCxnSpPr>
-          <p:cNvPr id="37" name="Connector 36"/>
-          <p:cNvCxnSpPr/>
-          <p:nvPr/>
-        </p:nvCxnSpPr>
-        <p:spPr>
-          <a:xfrm>
-            <a:off x="3889375" y="2990850"/>
-            <a:ext cx="1044575" cy="0"/>
-          </a:xfrm>
-          <a:prstGeom prst="line">
-            <a:avLst/>
-          </a:prstGeom>
-          <a:ln w="19050">
-            <a:solidFill>
-              <a:srgbClr val="2563EB"/>
-            </a:solidFill>
-          </a:ln>
-        </p:spPr>
-        <p:style>
-          <a:lnRef idx="2">
-            <a:schemeClr val="accent1"/>
-          </a:lnRef>
-          <a:fillRef idx="0">
-            <a:schemeClr val="accent1"/>
-          </a:fillRef>
-          <a:effectRef idx="1">
-            <a:schemeClr val="accent1"/>
-          </a:effectRef>
-          <a:fontRef idx="minor">
-            <a:schemeClr val="tx1"/>
-          </a:fontRef>
-        </p:style>
-      </p:cxnSp>
-      <p:sp>
-        <p:nvSpPr>
-          <p:cNvPr id="38" name="Isosceles Triangle 37"/>
-          <p:cNvSpPr/>
-          <p:nvPr/>
-        </p:nvSpPr>
-        <p:spPr>
-          <a:xfrm rot="5400000">
-            <a:off x="4848226" y="2947988"/>
-            <a:ext cx="85725" cy="85725"/>
-          </a:xfrm>
-          <a:prstGeom prst="triangle">
-            <a:avLst/>
-          </a:prstGeom>
-          <a:solidFill>
-            <a:srgbClr val="2563EB"/>
-          </a:solidFill>
-          <a:ln>
-            <a:noFill/>
-          </a:ln>
-          <a:effectLst/>
-        </p:spPr>
-        <p:style>
-          <a:lnRef idx="1">
-            <a:schemeClr val="accent1"/>
-          </a:lnRef>
-          <a:fillRef idx="3">
-            <a:schemeClr val="accent1"/>
-          </a:fillRef>
-          <a:effectRef idx="2">
-            <a:schemeClr val="accent1"/>
-          </a:effectRef>
-          <a:fontRef idx="minor">
-            <a:schemeClr val="lt1"/>
-          </a:fontRef>
-        </p:style>
-        <p:txBody>
-          <a:bodyPr rtlCol="0" anchor="ctr"/>
-          <a:lstStyle/>
-          <a:p>
-            <a:pPr algn="ctr"/>
-          </a:p>
-        </p:txBody>
-      </p:sp>
-      <p:sp>
-        <p:nvSpPr>
-          <p:cNvPr id="39" name="Rounded Rectangle 38"/>
-          <p:cNvSpPr/>
-          <p:nvPr/>
-        </p:nvSpPr>
-        <p:spPr>
-          <a:xfrm>
-            <a:off x="3849687" y="2847975"/>
-            <a:ext cx="1123950" cy="285750"/>
-          </a:xfrm>
-          <a:prstGeom prst="roundRect">
-            <a:avLst>
-              <a:gd name="adj" fmla="val 8000"/>
-            </a:avLst>
-          </a:prstGeom>
-          <a:solidFill>
-            <a:srgbClr val="FFFFFF"/>
-          </a:solidFill>
-          <a:ln w="12700">
-            <a:solidFill>
-              <a:srgbClr val="DDE5EE"/>
-            </a:solidFill>
-          </a:ln>
-          <a:effectLst/>
-        </p:spPr>
-        <p:style>
-          <a:lnRef idx="1">
-            <a:schemeClr val="accent1"/>
-          </a:lnRef>
-          <a:fillRef idx="3">
-            <a:schemeClr val="accent1"/>
-          </a:fillRef>
-          <a:effectRef idx="2">
-            <a:schemeClr val="accent1"/>
-          </a:effectRef>
-          <a:fontRef idx="minor">
-            <a:schemeClr val="lt1"/>
-          </a:fontRef>
-        </p:style>
-        <p:txBody>
-          <a:bodyPr rtlCol="0" anchor="ctr"/>
-          <a:lstStyle/>
-          <a:p>
-            <a:pPr algn="ctr"/>
-          </a:p>
-        </p:txBody>
-      </p:sp>
-      <p:sp>
-        <p:nvSpPr>
-          <p:cNvPr id="40" name="TextBox 39"/>
+          </a:ln>
+          <a:effectLst/>
+        </p:spPr>
+        <p:style>
+          <a:lnRef idx="1">
+            <a:schemeClr val="accent1"/>
+          </a:lnRef>
+          <a:fillRef idx="3">
+            <a:schemeClr val="accent1"/>
+          </a:fillRef>
+          <a:effectRef idx="2">
+            <a:schemeClr val="accent1"/>
+          </a:effectRef>
+          <a:fontRef idx="minor">
+            <a:schemeClr val="lt1"/>
+          </a:fontRef>
+        </p:style>
+        <p:txBody>
+          <a:bodyPr rtlCol="0" anchor="ctr"/>
+          <a:lstStyle/>
+          <a:p>
+            <a:pPr algn="ctr"/>
+          </a:p>
+        </p:txBody>
+      </p:sp>
+      <p:sp>
+        <p:nvSpPr>
+          <p:cNvPr id="34" name="TextBox 33"/>
           <p:cNvSpPr txBox="1"/>
           <p:nvPr/>
         </p:nvSpPr>
         <p:spPr>
           <a:xfrm>
-            <a:off x="3849687" y="2847975"/>
-            <a:ext cx="1123950" cy="285750"/>
+            <a:off x="3849687" y="2838450"/>
+            <a:ext cx="1123950" cy="304800"/>
           </a:xfrm>
           <a:prstGeom prst="rect">
             <a:avLst/>
@@ -6600,342 +6378,94 @@
           </a:p>
         </p:txBody>
       </p:sp>
-      <p:cxnSp>
-        <p:nvCxnSpPr>
-          <p:cNvPr id="41" name="Connector 40"/>
-          <p:cNvCxnSpPr/>
-          <p:nvPr/>
-        </p:nvCxnSpPr>
-        <p:spPr>
-          <a:xfrm flipV="1">
-            <a:off x="9398000" y="847725"/>
-            <a:ext cx="0" cy="419100"/>
-          </a:xfrm>
-          <a:prstGeom prst="line">
-            <a:avLst/>
-          </a:prstGeom>
-          <a:ln w="12700">
-            <a:solidFill>
-              <a:srgbClr val="DDE5EE"/>
-            </a:solidFill>
-            <a:prstDash val="dash"/>
-          </a:ln>
-          <a:effectLst/>
-        </p:spPr>
-        <p:style>
-          <a:lnRef idx="2">
-            <a:schemeClr val="accent1"/>
-          </a:lnRef>
-          <a:fillRef idx="0">
-            <a:schemeClr val="accent1"/>
-          </a:fillRef>
-          <a:effectRef idx="1">
-            <a:schemeClr val="accent1"/>
-          </a:effectRef>
-          <a:fontRef idx="minor">
-            <a:schemeClr val="tx1"/>
-          </a:fontRef>
-        </p:style>
-      </p:cxnSp>
-      <p:cxnSp>
-        <p:nvCxnSpPr>
-          <p:cNvPr id="42" name="Connector 41"/>
-          <p:cNvCxnSpPr/>
-          <p:nvPr/>
-        </p:nvCxnSpPr>
-        <p:spPr>
-          <a:xfrm flipH="1">
-            <a:off x="2794000" y="847725"/>
-            <a:ext cx="6604000" cy="0"/>
-          </a:xfrm>
-          <a:prstGeom prst="line">
-            <a:avLst/>
-          </a:prstGeom>
-          <a:ln w="12700">
-            <a:solidFill>
-              <a:srgbClr val="DDE5EE"/>
-            </a:solidFill>
-            <a:prstDash val="dash"/>
-          </a:ln>
-          <a:effectLst/>
-        </p:spPr>
-        <p:style>
-          <a:lnRef idx="2">
-            <a:schemeClr val="accent1"/>
-          </a:lnRef>
-          <a:fillRef idx="0">
-            <a:schemeClr val="accent1"/>
-          </a:fillRef>
-          <a:effectRef idx="1">
-            <a:schemeClr val="accent1"/>
-          </a:effectRef>
-          <a:fontRef idx="minor">
-            <a:schemeClr val="tx1"/>
-          </a:fontRef>
-        </p:style>
-      </p:cxnSp>
-      <p:cxnSp>
-        <p:nvCxnSpPr>
-          <p:cNvPr id="43" name="Connector 42"/>
-          <p:cNvCxnSpPr/>
-          <p:nvPr/>
-        </p:nvCxnSpPr>
-        <p:spPr>
-          <a:xfrm>
-            <a:off x="2794000" y="847725"/>
-            <a:ext cx="0" cy="3209925"/>
-          </a:xfrm>
-          <a:prstGeom prst="line">
-            <a:avLst/>
-          </a:prstGeom>
-          <a:ln w="12700">
-            <a:solidFill>
-              <a:srgbClr val="DDE5EE"/>
-            </a:solidFill>
-            <a:prstDash val="dash"/>
-          </a:ln>
-          <a:effectLst/>
-        </p:spPr>
-        <p:style>
-          <a:lnRef idx="2">
-            <a:schemeClr val="accent1"/>
-          </a:lnRef>
-          <a:fillRef idx="0">
-            <a:schemeClr val="accent1"/>
-          </a:fillRef>
-          <a:effectRef idx="1">
-            <a:schemeClr val="accent1"/>
-          </a:effectRef>
-          <a:fontRef idx="minor">
-            <a:schemeClr val="tx1"/>
-          </a:fontRef>
-        </p:style>
-      </p:cxnSp>
-      <p:cxnSp>
-        <p:nvCxnSpPr>
-          <p:cNvPr id="44" name="Connector 43"/>
-          <p:cNvCxnSpPr/>
-          <p:nvPr/>
-        </p:nvCxnSpPr>
-        <p:spPr>
-          <a:xfrm flipV="1">
-            <a:off x="9398000" y="847725"/>
-            <a:ext cx="0" cy="419100"/>
-          </a:xfrm>
-          <a:prstGeom prst="line">
-            <a:avLst/>
-          </a:prstGeom>
-          <a:ln w="12700">
-            <a:solidFill>
-              <a:srgbClr val="DDE5EE"/>
-            </a:solidFill>
-            <a:prstDash val="dash"/>
-          </a:ln>
-          <a:effectLst/>
-        </p:spPr>
-        <p:style>
-          <a:lnRef idx="2">
-            <a:schemeClr val="accent1"/>
-          </a:lnRef>
-          <a:fillRef idx="0">
-            <a:schemeClr val="accent1"/>
-          </a:fillRef>
-          <a:effectRef idx="1">
-            <a:schemeClr val="accent1"/>
-          </a:effectRef>
-          <a:fontRef idx="minor">
-            <a:schemeClr val="tx1"/>
-          </a:fontRef>
-        </p:style>
-      </p:cxnSp>
-      <p:cxnSp>
-        <p:nvCxnSpPr>
-          <p:cNvPr id="45" name="Connector 44"/>
-          <p:cNvCxnSpPr/>
-          <p:nvPr/>
-        </p:nvCxnSpPr>
-        <p:spPr>
-          <a:xfrm flipH="1">
-            <a:off x="6096000" y="847725"/>
-            <a:ext cx="3302000" cy="0"/>
-          </a:xfrm>
-          <a:prstGeom prst="line">
-            <a:avLst/>
-          </a:prstGeom>
-          <a:ln w="12700">
-            <a:solidFill>
-              <a:srgbClr val="DDE5EE"/>
-            </a:solidFill>
-            <a:prstDash val="dash"/>
-          </a:ln>
-          <a:effectLst/>
-        </p:spPr>
-        <p:style>
-          <a:lnRef idx="2">
-            <a:schemeClr val="accent1"/>
-          </a:lnRef>
-          <a:fillRef idx="0">
-            <a:schemeClr val="accent1"/>
-          </a:fillRef>
-          <a:effectRef idx="1">
-            <a:schemeClr val="accent1"/>
-          </a:effectRef>
-          <a:fontRef idx="minor">
-            <a:schemeClr val="tx1"/>
-          </a:fontRef>
-        </p:style>
-      </p:cxnSp>
-      <p:cxnSp>
-        <p:nvCxnSpPr>
-          <p:cNvPr id="46" name="Connector 45"/>
-          <p:cNvCxnSpPr/>
-          <p:nvPr/>
-        </p:nvCxnSpPr>
-        <p:spPr>
-          <a:xfrm>
-            <a:off x="6096000" y="847725"/>
-            <a:ext cx="0" cy="3209925"/>
-          </a:xfrm>
-          <a:prstGeom prst="line">
-            <a:avLst/>
-          </a:prstGeom>
-          <a:ln w="12700">
-            <a:solidFill>
-              <a:srgbClr val="DDE5EE"/>
-            </a:solidFill>
-            <a:prstDash val="dash"/>
-          </a:ln>
-          <a:effectLst/>
-        </p:spPr>
-        <p:style>
-          <a:lnRef idx="2">
-            <a:schemeClr val="accent1"/>
-          </a:lnRef>
-          <a:fillRef idx="0">
-            <a:schemeClr val="accent1"/>
-          </a:fillRef>
-          <a:effectRef idx="1">
-            <a:schemeClr val="accent1"/>
-          </a:effectRef>
-          <a:fontRef idx="minor">
-            <a:schemeClr val="tx1"/>
-          </a:fontRef>
-        </p:style>
-      </p:cxnSp>
-      <p:cxnSp>
-        <p:nvCxnSpPr>
-          <p:cNvPr id="47" name="Connector 46"/>
-          <p:cNvCxnSpPr/>
-          <p:nvPr/>
-        </p:nvCxnSpPr>
-        <p:spPr>
-          <a:xfrm flipV="1">
-            <a:off x="6096000" y="847725"/>
-            <a:ext cx="0" cy="3276600"/>
-          </a:xfrm>
-          <a:prstGeom prst="line">
-            <a:avLst/>
-          </a:prstGeom>
-          <a:ln w="12700">
-            <a:solidFill>
-              <a:srgbClr val="DDE5EE"/>
-            </a:solidFill>
-            <a:prstDash val="dash"/>
-          </a:ln>
-          <a:effectLst/>
-        </p:spPr>
-        <p:style>
-          <a:lnRef idx="2">
-            <a:schemeClr val="accent1"/>
-          </a:lnRef>
-          <a:fillRef idx="0">
-            <a:schemeClr val="accent1"/>
-          </a:fillRef>
-          <a:effectRef idx="1">
-            <a:schemeClr val="accent1"/>
-          </a:effectRef>
-          <a:fontRef idx="minor">
-            <a:schemeClr val="tx1"/>
-          </a:fontRef>
-        </p:style>
-      </p:cxnSp>
-      <p:cxnSp>
-        <p:nvCxnSpPr>
-          <p:cNvPr id="48" name="Connector 47"/>
-          <p:cNvCxnSpPr/>
-          <p:nvPr/>
-        </p:nvCxnSpPr>
-        <p:spPr>
-          <a:xfrm>
-            <a:off x="6096000" y="847725"/>
-            <a:ext cx="3302000" cy="0"/>
-          </a:xfrm>
-          <a:prstGeom prst="line">
-            <a:avLst/>
-          </a:prstGeom>
-          <a:ln w="12700">
-            <a:solidFill>
-              <a:srgbClr val="DDE5EE"/>
-            </a:solidFill>
-            <a:prstDash val="dash"/>
-          </a:ln>
-          <a:effectLst/>
-        </p:spPr>
-        <p:style>
-          <a:lnRef idx="2">
-            <a:schemeClr val="accent1"/>
-          </a:lnRef>
-          <a:fillRef idx="0">
-            <a:schemeClr val="accent1"/>
-          </a:fillRef>
-          <a:effectRef idx="1">
-            <a:schemeClr val="accent1"/>
-          </a:effectRef>
-          <a:fontRef idx="minor">
-            <a:schemeClr val="tx1"/>
-          </a:fontRef>
-        </p:style>
-      </p:cxnSp>
-      <p:cxnSp>
-        <p:nvCxnSpPr>
-          <p:cNvPr id="49" name="Connector 48"/>
-          <p:cNvCxnSpPr/>
-          <p:nvPr/>
-        </p:nvCxnSpPr>
-        <p:spPr>
-          <a:xfrm>
-            <a:off x="9398000" y="847725"/>
-            <a:ext cx="0" cy="352425"/>
-          </a:xfrm>
-          <a:prstGeom prst="line">
-            <a:avLst/>
-          </a:prstGeom>
-          <a:ln w="12700">
-            <a:solidFill>
-              <a:srgbClr val="DDE5EE"/>
-            </a:solidFill>
-            <a:prstDash val="dash"/>
-          </a:ln>
-          <a:effectLst/>
-        </p:spPr>
-        <p:style>
-          <a:lnRef idx="2">
-            <a:schemeClr val="accent1"/>
-          </a:lnRef>
-          <a:fillRef idx="0">
-            <a:schemeClr val="accent1"/>
-          </a:fillRef>
-          <a:effectRef idx="1">
-            <a:schemeClr val="accent1"/>
-          </a:effectRef>
-          <a:fontRef idx="minor">
-            <a:schemeClr val="tx1"/>
-          </a:fontRef>
-        </p:style>
-      </p:cxnSp>
-      <p:sp>
-        <p:nvSpPr>
-          <p:cNvPr id="50" name="TextBox 49"/>
+      <p:sp>
+        <p:nvSpPr>
+          <p:cNvPr id="35" name="Rounded Rectangle 34"/>
+          <p:cNvSpPr/>
+          <p:nvPr/>
+        </p:nvSpPr>
+        <p:spPr>
+          <a:xfrm>
+            <a:off x="1143000" y="6229350"/>
+            <a:ext cx="9906000" cy="381000"/>
+          </a:xfrm>
+          <a:prstGeom prst="roundRect">
+            <a:avLst>
+              <a:gd name="adj" fmla="val 8000"/>
+            </a:avLst>
+          </a:prstGeom>
+          <a:solidFill>
+            <a:srgbClr val="F1F5F9"/>
+          </a:solidFill>
+          <a:ln>
+            <a:noFill/>
+          </a:ln>
+          <a:effectLst/>
+        </p:spPr>
+        <p:style>
+          <a:lnRef idx="1">
+            <a:schemeClr val="accent1"/>
+          </a:lnRef>
+          <a:fillRef idx="3">
+            <a:schemeClr val="accent1"/>
+          </a:fillRef>
+          <a:effectRef idx="2">
+            <a:schemeClr val="accent1"/>
+          </a:effectRef>
+          <a:fontRef idx="minor">
+            <a:schemeClr val="lt1"/>
+          </a:fontRef>
+        </p:style>
+        <p:txBody>
+          <a:bodyPr rtlCol="0" anchor="ctr"/>
+          <a:lstStyle/>
+          <a:p>
+            <a:pPr algn="ctr"/>
+          </a:p>
+        </p:txBody>
+      </p:sp>
+      <p:sp>
+        <p:nvSpPr>
+          <p:cNvPr id="36" name="TextBox 35"/>
+          <p:cNvSpPr txBox="1"/>
+          <p:nvPr/>
+        </p:nvSpPr>
+        <p:spPr>
+          <a:xfrm>
+            <a:off x="1295400" y="6229350"/>
+            <a:ext cx="9601200" cy="381000"/>
+          </a:xfrm>
+          <a:prstGeom prst="rect">
+            <a:avLst/>
+          </a:prstGeom>
+          <a:noFill/>
+        </p:spPr>
+        <p:txBody>
+          <a:bodyPr wrap="square" anchor="ctr">
+            <a:spAutoFit/>
+          </a:bodyPr>
+          <a:lstStyle/>
+          <a:p>
+            <a:pPr algn="l">
+              <a:lnSpc>
+                <a:spcPct val="100000"/>
+              </a:lnSpc>
+            </a:pPr>
+            <a:r>
+              <a:rPr sz="1100" b="0">
+                <a:solidFill>
+                  <a:srgbClr val="475569"/>
+                </a:solidFill>
+                <a:latin typeface="PingFang SC"/>
+              </a:rPr>
+              <a:t>非相邻转移:running → waiting_tool  waiting_tool → running  running → completed  running → failed  failed → running</a:t>
+            </a:r>
+          </a:p>
+        </p:txBody>
+      </p:sp>
+      <p:sp>
+        <p:nvSpPr>
+          <p:cNvPr id="37" name="TextBox 36"/>
           <p:cNvSpPr txBox="1"/>
           <p:nvPr/>
         </p:nvSpPr>
@@ -6974,7 +6504,7 @@
       </p:sp>
       <p:sp>
         <p:nvSpPr>
-          <p:cNvPr id="51" name="TextBox 50"/>
+          <p:cNvPr id="38" name="TextBox 37"/>
           <p:cNvSpPr txBox="1"/>
           <p:nvPr/>
         </p:nvSpPr>
@@ -29895,8 +29425,8 @@
         </p:blipFill>
         <p:spPr>
           <a:xfrm>
-            <a:off x="2196435" y="762000"/>
-            <a:ext cx="7799128" cy="5760720"/>
+            <a:off x="2670707" y="762000"/>
+            <a:ext cx="6850585" cy="5760720"/>
           </a:xfrm>
           <a:prstGeom prst="rect">
             <a:avLst/>
